--- a/public/fun/pack/pptx/reviewpro/보장점검양식프리미엄_23_가족점검_터콰이즈골드.pptx
+++ b/public/fun/pack/pptx/reviewpro/보장점검양식프리미엄_23_가족점검_터콰이즈골드.pptx
@@ -112,12 +112,12 @@
   <p:extLst>
     <p:ext uri="{521415D9-36F7-43E2-AB2F-B90AF26B5E84}">
       <p14:sectionLst xmlns:p14="http://schemas.microsoft.com/office/powerpoint/2010/main">
-        <p14:section name="시작" id="{924BE610-619C-458B-AB4A-06A4F1812572}">
+        <p14:section name="시작" id="{7337412A-5977-4377-89DE-59679C4A538A}">
           <p14:sldIdLst>
             <p14:sldId id="256"/>
           </p14:sldIdLst>
         </p14:section>
-        <p14:section name="본문" id="{843C50A2-EBC5-44E1-8961-5DF47F3ED6FB}">
+        <p14:section name="본문" id="{E07A51DE-1C03-4724-82B2-8A9BE88687E2}">
           <p14:sldIdLst>
             <p14:sldId id="257"/>
             <p14:sldId id="258"/>
@@ -1595,7 +1595,7 @@
             </a:lvl1pPr>
           </a:lstStyle>
           <a:p>
-            <a:fld id="{670D80AC-47C9-4473-BC57-398B334E22A5}" type="slidenum">
+            <a:fld id="{00B0DF11-01DC-4F5A-B0D0-40B2C5D7FFB5}" type="slidenum">
               <a:rPr lang="en-US"/>
               <a:t>‹#›</a:t>
             </a:fld>
@@ -2314,7 +2314,7 @@
             </a:lvl1pPr>
           </a:lstStyle>
           <a:p>
-            <a:fld id="{0804C8A7-B609-48A7-9F55-A8CC49CA6C5A}" type="slidenum">
+            <a:fld id="{730CC18F-7B9D-4188-A9EC-84181F5E5EEF}" type="slidenum">
               <a:rPr lang="en-US"/>
               <a:t>‹#›</a:t>
             </a:fld>
@@ -2998,7 +2998,7 @@
             </a:lvl1pPr>
           </a:lstStyle>
           <a:p>
-            <a:fld id="{A8152223-3570-4D5D-98D4-F8E30D7008A3}" type="slidenum">
+            <a:fld id="{1A83B7FB-9C93-454C-946B-D9F2352EB64F}" type="slidenum">
               <a:rPr lang="en-US"/>
               <a:t>‹#›</a:t>
             </a:fld>
@@ -3821,7 +3821,7 @@
           <a:p>
             <a:r>
               <a:rPr lang="ko-KR"/>
-              <a:t>방학 동안 가족 회의로 정리합니다</a:t>
+              <a:t>가족 회의로 정리합니다</a:t>
             </a:r>
           </a:p>
         </p:txBody>
@@ -3843,7 +3843,7 @@
           <a:p>
             <a:r>
               <a:rPr lang="ko-KR"/>
-              <a:t>가족 점검 · 0000. 00. 00</a:t>
+              <a:t>가족 점검 · 날짜 입력</a:t>
             </a:r>
           </a:p>
           <a:p>
@@ -3934,7 +3934,7 @@
           <a:bodyPr/>
           <a:lstStyle/>
           <a:p>
-            <a:fld id="{F4936B45-4FF8-4DAB-AE10-CC7E42F21E22}" type="slidenum">
+            <a:fld id="{A2D85C8F-7BC1-4378-BDF7-20C3F71AD6F9}" type="slidenum">
               <a:rPr lang="en-US"/>
               <a:t>‹#›</a:t>
             </a:fld>
@@ -4844,7 +4844,7 @@
           <a:bodyPr/>
           <a:lstStyle/>
           <a:p>
-            <a:fld id="{D27D568D-199F-4F85-BFF3-5A858E9DA30D}" type="slidenum">
+            <a:fld id="{9E528D46-0FFA-4A8E-816E-5B0FB4331DCF}" type="slidenum">
               <a:rPr lang="en-US"/>
               <a:t>‹#›</a:t>
             </a:fld>
@@ -6350,7 +6350,7 @@
           <a:bodyPr/>
           <a:lstStyle/>
           <a:p>
-            <a:fld id="{42ABE774-A3CB-49E9-AC7F-13525270E7D6}" type="slidenum">
+            <a:fld id="{C319D07F-71A1-4DD6-9689-772C6D2A66AA}" type="slidenum">
               <a:rPr lang="en-US"/>
               <a:t>‹#›</a:t>
             </a:fld>
@@ -7900,7 +7900,7 @@
           <a:bodyPr/>
           <a:lstStyle/>
           <a:p>
-            <a:fld id="{501559E1-AD16-4D2C-A639-D5F7706E5DB3}" type="slidenum">
+            <a:fld id="{D88DAB52-F2A5-42DE-8865-29FF65872A27}" type="slidenum">
               <a:rPr lang="en-US"/>
               <a:t>‹#›</a:t>
             </a:fld>
@@ -8780,7 +8780,7 @@
           <a:bodyPr/>
           <a:lstStyle/>
           <a:p>
-            <a:fld id="{81510C5B-4671-49FB-A29E-A06C24A6266B}" type="slidenum">
+            <a:fld id="{3AF2390A-3D7E-4FCE-9E6F-5A159A5BA771}" type="slidenum">
               <a:rPr lang="en-US"/>
               <a:t>‹#›</a:t>
             </a:fld>
